--- a/sistemas-informacao/programacao-internet/modulo-03-react/spring-security.pptx
+++ b/sistemas-informacao/programacao-internet/modulo-03-react/spring-security.pptx
@@ -11,16 +11,15 @@
     <p:sldId id="325" r:id="rId5"/>
     <p:sldId id="321" r:id="rId6"/>
     <p:sldId id="322" r:id="rId7"/>
-    <p:sldId id="323" r:id="rId8"/>
-    <p:sldId id="326" r:id="rId9"/>
-    <p:sldId id="324" r:id="rId10"/>
-    <p:sldId id="327" r:id="rId11"/>
-    <p:sldId id="330" r:id="rId12"/>
-    <p:sldId id="328" r:id="rId13"/>
-    <p:sldId id="329" r:id="rId14"/>
-    <p:sldId id="332" r:id="rId15"/>
-    <p:sldId id="333" r:id="rId16"/>
-    <p:sldId id="331" r:id="rId17"/>
+    <p:sldId id="326" r:id="rId8"/>
+    <p:sldId id="324" r:id="rId9"/>
+    <p:sldId id="327" r:id="rId10"/>
+    <p:sldId id="330" r:id="rId11"/>
+    <p:sldId id="328" r:id="rId12"/>
+    <p:sldId id="329" r:id="rId13"/>
+    <p:sldId id="332" r:id="rId14"/>
+    <p:sldId id="333" r:id="rId15"/>
+    <p:sldId id="331" r:id="rId16"/>
   </p:sldIdLst>
   <p:sldSz cx="12192000" cy="6858000"/>
   <p:notesSz cx="6858000" cy="9144000"/>
@@ -130,7 +129,6 @@
             <p14:sldId id="325"/>
             <p14:sldId id="321"/>
             <p14:sldId id="322"/>
-            <p14:sldId id="323"/>
             <p14:sldId id="326"/>
             <p14:sldId id="324"/>
             <p14:sldId id="327"/>
@@ -731,7 +729,7 @@
           <a:p>
             <a:fld id="{CDD55C27-F8C6-4481-8569-CAC50CAE9F1F}" type="datetimeFigureOut">
               <a:rPr lang="pt-BR" smtClean="0"/>
-              <a:t>15/10/2026</a:t>
+              <a:t>18/10/2026</a:t>
             </a:fld>
             <a:endParaRPr lang="pt-BR"/>
           </a:p>
@@ -868,7 +866,7 @@
           <a:p>
             <a:fld id="{CDD55C27-F8C6-4481-8569-CAC50CAE9F1F}" type="datetimeFigureOut">
               <a:rPr lang="pt-BR" smtClean="0"/>
-              <a:t>15/10/2026</a:t>
+              <a:t>18/10/2026</a:t>
             </a:fld>
             <a:endParaRPr lang="pt-BR"/>
           </a:p>
@@ -1588,7 +1586,7 @@
           <a:p>
             <a:fld id="{CDD55C27-F8C6-4481-8569-CAC50CAE9F1F}" type="datetimeFigureOut">
               <a:rPr lang="pt-BR" smtClean="0"/>
-              <a:t>15/10/2026</a:t>
+              <a:t>18/10/2026</a:t>
             </a:fld>
             <a:endParaRPr lang="pt-BR"/>
           </a:p>
@@ -1768,7 +1766,7 @@
           <a:p>
             <a:fld id="{CDD55C27-F8C6-4481-8569-CAC50CAE9F1F}" type="datetimeFigureOut">
               <a:rPr lang="pt-BR" smtClean="0"/>
-              <a:t>15/10/2026</a:t>
+              <a:t>18/10/2026</a:t>
             </a:fld>
             <a:endParaRPr lang="pt-BR"/>
           </a:p>
@@ -1948,7 +1946,7 @@
           <a:p>
             <a:fld id="{CDD55C27-F8C6-4481-8569-CAC50CAE9F1F}" type="datetimeFigureOut">
               <a:rPr lang="pt-BR" smtClean="0"/>
-              <a:t>15/10/2026</a:t>
+              <a:t>18/10/2026</a:t>
             </a:fld>
             <a:endParaRPr lang="pt-BR"/>
           </a:p>
@@ -2159,7 +2157,7 @@
           <a:p>
             <a:fld id="{CDD55C27-F8C6-4481-8569-CAC50CAE9F1F}" type="datetimeFigureOut">
               <a:rPr lang="pt-BR" smtClean="0"/>
-              <a:t>15/10/2026</a:t>
+              <a:t>18/10/2026</a:t>
             </a:fld>
             <a:endParaRPr lang="pt-BR"/>
           </a:p>
@@ -2614,7 +2612,7 @@
           <a:p>
             <a:fld id="{CDD55C27-F8C6-4481-8569-CAC50CAE9F1F}" type="datetimeFigureOut">
               <a:rPr lang="pt-BR" smtClean="0"/>
-              <a:t>15/10/2026</a:t>
+              <a:t>18/10/2026</a:t>
             </a:fld>
             <a:endParaRPr lang="pt-BR"/>
           </a:p>
@@ -3277,666 +3275,6 @@
   <p:cSld>
     <p:spTree>
       <p:nvGrpSpPr>
-        <p:cNvPr id="1" name=""/>
-        <p:cNvGrpSpPr/>
-        <p:nvPr/>
-      </p:nvGrpSpPr>
-      <p:grpSpPr>
-        <a:xfrm>
-          <a:off x="0" y="0"/>
-          <a:ext cx="0" cy="0"/>
-          <a:chOff x="0" y="0"/>
-          <a:chExt cx="0" cy="0"/>
-        </a:xfrm>
-      </p:grpSpPr>
-      <p:sp>
-        <p:nvSpPr>
-          <p:cNvPr id="2" name="Título 1">
-            <a:extLst>
-              <a:ext uri="{FF2B5EF4-FFF2-40B4-BE49-F238E27FC236}">
-                <a16:creationId xmlns:a16="http://schemas.microsoft.com/office/drawing/2014/main" id="{FB438DB6-24A7-2EE8-2F09-818FEA0B13E5}"/>
-              </a:ext>
-            </a:extLst>
-          </p:cNvPr>
-          <p:cNvSpPr>
-            <a:spLocks noGrp="1"/>
-          </p:cNvSpPr>
-          <p:nvPr>
-            <p:ph type="title"/>
-          </p:nvPr>
-        </p:nvSpPr>
-        <p:spPr/>
-        <p:txBody>
-          <a:bodyPr/>
-          <a:lstStyle/>
-          <a:p>
-            <a:r>
-              <a:rPr lang="pt-BR" dirty="0"/>
-              <a:t>Regra: Utilizar uma única </a:t>
-            </a:r>
-            <a:r>
-              <a:rPr lang="pt-BR" dirty="0" err="1"/>
-              <a:t>tag</a:t>
-            </a:r>
-            <a:r>
-              <a:rPr lang="pt-BR" dirty="0"/>
-              <a:t> pai</a:t>
-            </a:r>
-          </a:p>
-        </p:txBody>
-      </p:sp>
-      <p:sp>
-        <p:nvSpPr>
-          <p:cNvPr id="3" name="Espaço Reservado para Conteúdo 2">
-            <a:extLst>
-              <a:ext uri="{FF2B5EF4-FFF2-40B4-BE49-F238E27FC236}">
-                <a16:creationId xmlns:a16="http://schemas.microsoft.com/office/drawing/2014/main" id="{4CE731E1-BF12-8612-DF4A-E948BE49BAE0}"/>
-              </a:ext>
-            </a:extLst>
-          </p:cNvPr>
-          <p:cNvSpPr>
-            <a:spLocks noGrp="1"/>
-          </p:cNvSpPr>
-          <p:nvPr>
-            <p:ph idx="1"/>
-          </p:nvPr>
-        </p:nvSpPr>
-        <p:spPr>
-          <a:xfrm>
-            <a:off x="592347" y="1844675"/>
-            <a:ext cx="11007306" cy="722399"/>
-          </a:xfrm>
-        </p:spPr>
-        <p:txBody>
-          <a:bodyPr/>
-          <a:lstStyle/>
-          <a:p>
-            <a:r>
-              <a:rPr lang="pt-BR" dirty="0"/>
-              <a:t>No JSX, todos os elementos retornados por um componente devem estar dentro de um único elemento pai.</a:t>
-            </a:r>
-          </a:p>
-        </p:txBody>
-      </p:sp>
-      <p:grpSp>
-        <p:nvGrpSpPr>
-          <p:cNvPr id="13" name="Agrupar 12">
-            <a:extLst>
-              <a:ext uri="{FF2B5EF4-FFF2-40B4-BE49-F238E27FC236}">
-                <a16:creationId xmlns:a16="http://schemas.microsoft.com/office/drawing/2014/main" id="{C0AF780F-F8AB-7BFA-ED23-6114DA50AEC8}"/>
-              </a:ext>
-            </a:extLst>
-          </p:cNvPr>
-          <p:cNvGrpSpPr/>
-          <p:nvPr/>
-        </p:nvGrpSpPr>
-        <p:grpSpPr>
-          <a:xfrm>
-            <a:off x="744152" y="3217654"/>
-            <a:ext cx="4710023" cy="3168140"/>
-            <a:chOff x="744152" y="3217654"/>
-            <a:chExt cx="4710023" cy="3168140"/>
-          </a:xfrm>
-        </p:grpSpPr>
-        <p:sp>
-          <p:nvSpPr>
-            <p:cNvPr id="7" name="Shape 20">
-              <a:extLst>
-                <a:ext uri="{FF2B5EF4-FFF2-40B4-BE49-F238E27FC236}">
-                  <a16:creationId xmlns:a16="http://schemas.microsoft.com/office/drawing/2014/main" id="{6700C51B-411A-ED88-F128-08B49EA6AE41}"/>
-                </a:ext>
-              </a:extLst>
-            </p:cNvPr>
-            <p:cNvSpPr/>
-            <p:nvPr/>
-          </p:nvSpPr>
-          <p:spPr>
-            <a:xfrm>
-              <a:off x="744152" y="3217654"/>
-              <a:ext cx="4710023" cy="3168140"/>
-            </a:xfrm>
-            <a:prstGeom prst="roundRect">
-              <a:avLst>
-                <a:gd name="adj" fmla="val 8081"/>
-              </a:avLst>
-            </a:prstGeom>
-            <a:solidFill>
-              <a:srgbClr val="F2F2F2"/>
-            </a:solidFill>
-            <a:ln/>
-          </p:spPr>
-          <p:txBody>
-            <a:bodyPr/>
-            <a:lstStyle/>
-            <a:p>
-              <a:pPr>
-                <a:lnSpc>
-                  <a:spcPct val="150000"/>
-                </a:lnSpc>
-              </a:pPr>
-              <a:endParaRPr lang="pt-BR" kern="0" spc="-19" dirty="0">
-                <a:solidFill>
-                  <a:srgbClr val="D73A49"/>
-                </a:solidFill>
-                <a:latin typeface="Consolas" pitchFamily="34" charset="0"/>
-              </a:endParaRPr>
-            </a:p>
-          </p:txBody>
-        </p:sp>
-        <p:sp>
-          <p:nvSpPr>
-            <p:cNvPr id="8" name="CaixaDeTexto 7">
-              <a:extLst>
-                <a:ext uri="{FF2B5EF4-FFF2-40B4-BE49-F238E27FC236}">
-                  <a16:creationId xmlns:a16="http://schemas.microsoft.com/office/drawing/2014/main" id="{F5C5ADDE-0311-7903-7B55-714BAFDF1140}"/>
-                </a:ext>
-              </a:extLst>
-            </p:cNvPr>
-            <p:cNvSpPr txBox="1"/>
-            <p:nvPr/>
-          </p:nvSpPr>
-          <p:spPr>
-            <a:xfrm>
-              <a:off x="935993" y="3837148"/>
-              <a:ext cx="4326340" cy="2125325"/>
-            </a:xfrm>
-            <a:prstGeom prst="rect">
-              <a:avLst/>
-            </a:prstGeom>
-            <a:noFill/>
-          </p:spPr>
-          <p:txBody>
-            <a:bodyPr wrap="square">
-              <a:spAutoFit/>
-            </a:bodyPr>
-            <a:lstStyle/>
-            <a:p>
-              <a:pPr>
-                <a:lnSpc>
-                  <a:spcPct val="150000"/>
-                </a:lnSpc>
-              </a:pPr>
-              <a:r>
-                <a:rPr lang="pt-BR" sz="1800" kern="0" spc="-19" dirty="0" err="1">
-                  <a:solidFill>
-                    <a:srgbClr val="D73A49"/>
-                  </a:solidFill>
-                  <a:latin typeface="Consolas" pitchFamily="34" charset="0"/>
-                </a:rPr>
-                <a:t>return</a:t>
-              </a:r>
-              <a:r>
-                <a:rPr lang="pt-BR" sz="1800" kern="0" spc="-19" dirty="0">
-                  <a:solidFill>
-                    <a:srgbClr val="D73A49"/>
-                  </a:solidFill>
-                  <a:latin typeface="Consolas" pitchFamily="34" charset="0"/>
-                </a:rPr>
-                <a:t> (  </a:t>
-              </a:r>
-            </a:p>
-            <a:p>
-              <a:pPr>
-                <a:lnSpc>
-                  <a:spcPct val="150000"/>
-                </a:lnSpc>
-              </a:pPr>
-              <a:r>
-                <a:rPr lang="pt-BR" sz="1800" kern="0" spc="-19" dirty="0">
-                  <a:solidFill>
-                    <a:srgbClr val="D73A49"/>
-                  </a:solidFill>
-                  <a:latin typeface="Consolas" pitchFamily="34" charset="0"/>
-                </a:rPr>
-                <a:t>  &lt;h1&gt;Olá, mundo!&lt;/h1&gt;  </a:t>
-              </a:r>
-            </a:p>
-            <a:p>
-              <a:pPr>
-                <a:lnSpc>
-                  <a:spcPct val="150000"/>
-                </a:lnSpc>
-              </a:pPr>
-              <a:r>
-                <a:rPr lang="pt-BR" sz="1800" kern="0" spc="-19" dirty="0">
-                  <a:solidFill>
-                    <a:srgbClr val="D73A49"/>
-                  </a:solidFill>
-                  <a:latin typeface="Consolas" pitchFamily="34" charset="0"/>
-                </a:rPr>
-                <a:t>  &lt;p&gt;Bem-vindo ao </a:t>
-              </a:r>
-              <a:r>
-                <a:rPr lang="pt-BR" sz="1800" kern="0" spc="-19" dirty="0" err="1">
-                  <a:solidFill>
-                    <a:srgbClr val="D73A49"/>
-                  </a:solidFill>
-                  <a:latin typeface="Consolas" pitchFamily="34" charset="0"/>
-                </a:rPr>
-                <a:t>React</a:t>
-              </a:r>
-              <a:r>
-                <a:rPr lang="pt-BR" sz="1800" kern="0" spc="-19" dirty="0">
-                  <a:solidFill>
-                    <a:srgbClr val="D73A49"/>
-                  </a:solidFill>
-                  <a:latin typeface="Consolas" pitchFamily="34" charset="0"/>
-                </a:rPr>
-                <a:t>!&lt;/p&gt;</a:t>
-              </a:r>
-            </a:p>
-            <a:p>
-              <a:pPr>
-                <a:lnSpc>
-                  <a:spcPct val="150000"/>
-                </a:lnSpc>
-              </a:pPr>
-              <a:r>
-                <a:rPr lang="pt-BR" sz="1800" kern="0" spc="-19" dirty="0">
-                  <a:solidFill>
-                    <a:srgbClr val="D73A49"/>
-                  </a:solidFill>
-                  <a:latin typeface="Consolas" pitchFamily="34" charset="0"/>
-                </a:rPr>
-                <a:t>);</a:t>
-              </a:r>
-            </a:p>
-            <a:p>
-              <a:pPr>
-                <a:lnSpc>
-                  <a:spcPct val="150000"/>
-                </a:lnSpc>
-              </a:pPr>
-              <a:endParaRPr lang="pt-BR" sz="1800" kern="0" spc="-19" dirty="0">
-                <a:solidFill>
-                  <a:srgbClr val="D73A49"/>
-                </a:solidFill>
-                <a:latin typeface="Consolas" pitchFamily="34" charset="0"/>
-              </a:endParaRPr>
-            </a:p>
-          </p:txBody>
-        </p:sp>
-      </p:grpSp>
-      <p:grpSp>
-        <p:nvGrpSpPr>
-          <p:cNvPr id="12" name="Agrupar 11">
-            <a:extLst>
-              <a:ext uri="{FF2B5EF4-FFF2-40B4-BE49-F238E27FC236}">
-                <a16:creationId xmlns:a16="http://schemas.microsoft.com/office/drawing/2014/main" id="{867A3347-55AE-0C96-0399-43E86CCC6C53}"/>
-              </a:ext>
-            </a:extLst>
-          </p:cNvPr>
-          <p:cNvGrpSpPr/>
-          <p:nvPr/>
-        </p:nvGrpSpPr>
-        <p:grpSpPr>
-          <a:xfrm>
-            <a:off x="6737825" y="3217654"/>
-            <a:ext cx="4710023" cy="3168141"/>
-            <a:chOff x="6174419" y="3333708"/>
-            <a:chExt cx="4710023" cy="3168141"/>
-          </a:xfrm>
-        </p:grpSpPr>
-        <p:sp>
-          <p:nvSpPr>
-            <p:cNvPr id="10" name="Shape 20">
-              <a:extLst>
-                <a:ext uri="{FF2B5EF4-FFF2-40B4-BE49-F238E27FC236}">
-                  <a16:creationId xmlns:a16="http://schemas.microsoft.com/office/drawing/2014/main" id="{55E654D0-04B0-CF34-5BED-4B0178C6C1DB}"/>
-                </a:ext>
-              </a:extLst>
-            </p:cNvPr>
-            <p:cNvSpPr/>
-            <p:nvPr/>
-          </p:nvSpPr>
-          <p:spPr>
-            <a:xfrm>
-              <a:off x="6174419" y="3333708"/>
-              <a:ext cx="4710023" cy="3168141"/>
-            </a:xfrm>
-            <a:prstGeom prst="roundRect">
-              <a:avLst>
-                <a:gd name="adj" fmla="val 8081"/>
-              </a:avLst>
-            </a:prstGeom>
-            <a:solidFill>
-              <a:srgbClr val="F2F2F2"/>
-            </a:solidFill>
-            <a:ln/>
-          </p:spPr>
-          <p:txBody>
-            <a:bodyPr/>
-            <a:lstStyle/>
-            <a:p>
-              <a:pPr>
-                <a:lnSpc>
-                  <a:spcPct val="150000"/>
-                </a:lnSpc>
-              </a:pPr>
-              <a:endParaRPr lang="pt-BR" kern="0" spc="-19" dirty="0">
-                <a:solidFill>
-                  <a:srgbClr val="D73A49"/>
-                </a:solidFill>
-                <a:latin typeface="Consolas" pitchFamily="34" charset="0"/>
-              </a:endParaRPr>
-            </a:p>
-          </p:txBody>
-        </p:sp>
-        <p:sp>
-          <p:nvSpPr>
-            <p:cNvPr id="11" name="CaixaDeTexto 10">
-              <a:extLst>
-                <a:ext uri="{FF2B5EF4-FFF2-40B4-BE49-F238E27FC236}">
-                  <a16:creationId xmlns:a16="http://schemas.microsoft.com/office/drawing/2014/main" id="{5841F903-E94D-50FC-7CF1-62F588400304}"/>
-                </a:ext>
-              </a:extLst>
-            </p:cNvPr>
-            <p:cNvSpPr txBox="1"/>
-            <p:nvPr/>
-          </p:nvSpPr>
-          <p:spPr>
-            <a:xfrm>
-              <a:off x="6366260" y="3647367"/>
-              <a:ext cx="4326340" cy="2540822"/>
-            </a:xfrm>
-            <a:prstGeom prst="rect">
-              <a:avLst/>
-            </a:prstGeom>
-            <a:noFill/>
-          </p:spPr>
-          <p:txBody>
-            <a:bodyPr wrap="square">
-              <a:spAutoFit/>
-            </a:bodyPr>
-            <a:lstStyle/>
-            <a:p>
-              <a:pPr>
-                <a:lnSpc>
-                  <a:spcPct val="150000"/>
-                </a:lnSpc>
-              </a:pPr>
-              <a:r>
-                <a:rPr lang="pt-BR" sz="1800" kern="0" spc="-19" dirty="0" err="1">
-                  <a:solidFill>
-                    <a:srgbClr val="D73A49"/>
-                  </a:solidFill>
-                  <a:latin typeface="Consolas" pitchFamily="34" charset="0"/>
-                </a:rPr>
-                <a:t>return</a:t>
-              </a:r>
-              <a:r>
-                <a:rPr lang="pt-BR" sz="1800" kern="0" spc="-19" dirty="0">
-                  <a:solidFill>
-                    <a:srgbClr val="D73A49"/>
-                  </a:solidFill>
-                  <a:latin typeface="Consolas" pitchFamily="34" charset="0"/>
-                </a:rPr>
-                <a:t> (  </a:t>
-              </a:r>
-            </a:p>
-            <a:p>
-              <a:pPr>
-                <a:lnSpc>
-                  <a:spcPct val="150000"/>
-                </a:lnSpc>
-              </a:pPr>
-              <a:r>
-                <a:rPr lang="pt-BR" sz="1800" kern="0" spc="-19" dirty="0">
-                  <a:solidFill>
-                    <a:srgbClr val="D73A49"/>
-                  </a:solidFill>
-                  <a:latin typeface="Consolas" pitchFamily="34" charset="0"/>
-                </a:rPr>
-                <a:t>  &lt;</a:t>
-              </a:r>
-              <a:r>
-                <a:rPr lang="pt-BR" sz="1800" kern="0" spc="-19" dirty="0" err="1">
-                  <a:solidFill>
-                    <a:srgbClr val="D73A49"/>
-                  </a:solidFill>
-                  <a:latin typeface="Consolas" pitchFamily="34" charset="0"/>
-                </a:rPr>
-                <a:t>div</a:t>
-              </a:r>
-              <a:r>
-                <a:rPr lang="pt-BR" sz="1800" kern="0" spc="-19" dirty="0">
-                  <a:solidFill>
-                    <a:srgbClr val="D73A49"/>
-                  </a:solidFill>
-                  <a:latin typeface="Consolas" pitchFamily="34" charset="0"/>
-                </a:rPr>
-                <a:t>&gt;    </a:t>
-              </a:r>
-            </a:p>
-            <a:p>
-              <a:pPr>
-                <a:lnSpc>
-                  <a:spcPct val="150000"/>
-                </a:lnSpc>
-              </a:pPr>
-              <a:r>
-                <a:rPr lang="pt-BR" sz="1800" kern="0" spc="-19" dirty="0">
-                  <a:solidFill>
-                    <a:srgbClr val="D73A49"/>
-                  </a:solidFill>
-                  <a:latin typeface="Consolas" pitchFamily="34" charset="0"/>
-                </a:rPr>
-                <a:t>    &lt;h1&gt;Olá, mundo!&lt;/h1&gt;    </a:t>
-              </a:r>
-            </a:p>
-            <a:p>
-              <a:pPr>
-                <a:lnSpc>
-                  <a:spcPct val="150000"/>
-                </a:lnSpc>
-              </a:pPr>
-              <a:r>
-                <a:rPr lang="pt-BR" sz="1800" kern="0" spc="-19" dirty="0">
-                  <a:solidFill>
-                    <a:srgbClr val="D73A49"/>
-                  </a:solidFill>
-                  <a:latin typeface="Consolas" pitchFamily="34" charset="0"/>
-                </a:rPr>
-                <a:t>    &lt;p&gt;Bem-vindo ao </a:t>
-              </a:r>
-              <a:r>
-                <a:rPr lang="pt-BR" sz="1800" kern="0" spc="-19" dirty="0" err="1">
-                  <a:solidFill>
-                    <a:srgbClr val="D73A49"/>
-                  </a:solidFill>
-                  <a:latin typeface="Consolas" pitchFamily="34" charset="0"/>
-                </a:rPr>
-                <a:t>React</a:t>
-              </a:r>
-              <a:r>
-                <a:rPr lang="pt-BR" sz="1800" kern="0" spc="-19" dirty="0">
-                  <a:solidFill>
-                    <a:srgbClr val="D73A49"/>
-                  </a:solidFill>
-                  <a:latin typeface="Consolas" pitchFamily="34" charset="0"/>
-                </a:rPr>
-                <a:t>!&lt;/p&gt;</a:t>
-              </a:r>
-            </a:p>
-            <a:p>
-              <a:pPr>
-                <a:lnSpc>
-                  <a:spcPct val="150000"/>
-                </a:lnSpc>
-              </a:pPr>
-              <a:r>
-                <a:rPr lang="pt-BR" kern="0" spc="-19" dirty="0">
-                  <a:solidFill>
-                    <a:srgbClr val="D73A49"/>
-                  </a:solidFill>
-                  <a:latin typeface="Consolas" pitchFamily="34" charset="0"/>
-                </a:rPr>
-                <a:t>  </a:t>
-              </a:r>
-              <a:r>
-                <a:rPr lang="pt-BR" sz="1800" kern="0" spc="-19" dirty="0">
-                  <a:solidFill>
-                    <a:srgbClr val="D73A49"/>
-                  </a:solidFill>
-                  <a:latin typeface="Consolas" pitchFamily="34" charset="0"/>
-                </a:rPr>
-                <a:t>&lt;/</a:t>
-              </a:r>
-              <a:r>
-                <a:rPr lang="pt-BR" sz="1800" kern="0" spc="-19" dirty="0" err="1">
-                  <a:solidFill>
-                    <a:srgbClr val="D73A49"/>
-                  </a:solidFill>
-                  <a:latin typeface="Consolas" pitchFamily="34" charset="0"/>
-                </a:rPr>
-                <a:t>div</a:t>
-              </a:r>
-              <a:r>
-                <a:rPr lang="pt-BR" sz="1800" kern="0" spc="-19" dirty="0">
-                  <a:solidFill>
-                    <a:srgbClr val="D73A49"/>
-                  </a:solidFill>
-                  <a:latin typeface="Consolas" pitchFamily="34" charset="0"/>
-                </a:rPr>
-                <a:t>&gt;</a:t>
-              </a:r>
-            </a:p>
-            <a:p>
-              <a:pPr>
-                <a:lnSpc>
-                  <a:spcPct val="150000"/>
-                </a:lnSpc>
-              </a:pPr>
-              <a:r>
-                <a:rPr lang="pt-BR" sz="1800" kern="0" spc="-19" dirty="0">
-                  <a:solidFill>
-                    <a:srgbClr val="D73A49"/>
-                  </a:solidFill>
-                  <a:latin typeface="Consolas" pitchFamily="34" charset="0"/>
-                </a:rPr>
-                <a:t>);  </a:t>
-              </a:r>
-            </a:p>
-          </p:txBody>
-        </p:sp>
-      </p:grpSp>
-      <p:sp>
-        <p:nvSpPr>
-          <p:cNvPr id="15" name="CaixaDeTexto 14">
-            <a:extLst>
-              <a:ext uri="{FF2B5EF4-FFF2-40B4-BE49-F238E27FC236}">
-                <a16:creationId xmlns:a16="http://schemas.microsoft.com/office/drawing/2014/main" id="{224E89D1-DD63-C095-2DA2-4B55F7CBBC99}"/>
-              </a:ext>
-            </a:extLst>
-          </p:cNvPr>
-          <p:cNvSpPr txBox="1"/>
-          <p:nvPr/>
-        </p:nvSpPr>
-        <p:spPr>
-          <a:xfrm>
-            <a:off x="744152" y="2609667"/>
-            <a:ext cx="1485343" cy="369332"/>
-          </a:xfrm>
-          <a:prstGeom prst="rect">
-            <a:avLst/>
-          </a:prstGeom>
-          <a:noFill/>
-        </p:spPr>
-        <p:txBody>
-          <a:bodyPr wrap="none" rtlCol="0">
-            <a:spAutoFit/>
-          </a:bodyPr>
-          <a:lstStyle/>
-          <a:p>
-            <a:r>
-              <a:rPr lang="pt-BR" b="1" dirty="0">
-                <a:solidFill>
-                  <a:srgbClr val="FF0000"/>
-                </a:solidFill>
-                <a:latin typeface="Times New Roman" panose="02020603050405020304" pitchFamily="18" charset="0"/>
-                <a:cs typeface="Times New Roman" panose="02020603050405020304" pitchFamily="18" charset="0"/>
-              </a:rPr>
-              <a:t>❌ Incorreto</a:t>
-            </a:r>
-          </a:p>
-        </p:txBody>
-      </p:sp>
-      <p:sp>
-        <p:nvSpPr>
-          <p:cNvPr id="17" name="CaixaDeTexto 16">
-            <a:extLst>
-              <a:ext uri="{FF2B5EF4-FFF2-40B4-BE49-F238E27FC236}">
-                <a16:creationId xmlns:a16="http://schemas.microsoft.com/office/drawing/2014/main" id="{ED3C0AC0-0D08-6CDF-C19D-095023B1AB30}"/>
-              </a:ext>
-            </a:extLst>
-          </p:cNvPr>
-          <p:cNvSpPr txBox="1"/>
-          <p:nvPr/>
-        </p:nvSpPr>
-        <p:spPr>
-          <a:xfrm>
-            <a:off x="6737825" y="2609667"/>
-            <a:ext cx="3069110" cy="369332"/>
-          </a:xfrm>
-          <a:prstGeom prst="rect">
-            <a:avLst/>
-          </a:prstGeom>
-          <a:noFill/>
-        </p:spPr>
-        <p:txBody>
-          <a:bodyPr wrap="none" rtlCol="0">
-            <a:spAutoFit/>
-          </a:bodyPr>
-          <a:lstStyle/>
-          <a:p>
-            <a:r>
-              <a:rPr lang="pt-BR" b="1" dirty="0">
-                <a:solidFill>
-                  <a:srgbClr val="66A480"/>
-                </a:solidFill>
-                <a:latin typeface="Times New Roman" panose="02020603050405020304" pitchFamily="18" charset="0"/>
-                <a:cs typeface="Times New Roman" panose="02020603050405020304" pitchFamily="18" charset="0"/>
-              </a:rPr>
-              <a:t>✅ Correto — Utilizando </a:t>
-            </a:r>
-            <a:r>
-              <a:rPr lang="pt-BR" b="1" dirty="0" err="1">
-                <a:solidFill>
-                  <a:srgbClr val="66A480"/>
-                </a:solidFill>
-                <a:latin typeface="Times New Roman" panose="02020603050405020304" pitchFamily="18" charset="0"/>
-                <a:cs typeface="Times New Roman" panose="02020603050405020304" pitchFamily="18" charset="0"/>
-              </a:rPr>
-              <a:t>div</a:t>
-            </a:r>
-            <a:endParaRPr lang="pt-BR" b="1" dirty="0">
-              <a:solidFill>
-                <a:srgbClr val="66A480"/>
-              </a:solidFill>
-              <a:latin typeface="Times New Roman" panose="02020603050405020304" pitchFamily="18" charset="0"/>
-              <a:cs typeface="Times New Roman" panose="02020603050405020304" pitchFamily="18" charset="0"/>
-            </a:endParaRPr>
-          </a:p>
-        </p:txBody>
-      </p:sp>
-    </p:spTree>
-    <p:extLst>
-      <p:ext uri="{BB962C8B-B14F-4D97-AF65-F5344CB8AC3E}">
-        <p14:creationId xmlns:p14="http://schemas.microsoft.com/office/powerpoint/2010/main" val="3889538878"/>
-      </p:ext>
-    </p:extLst>
-  </p:cSld>
-  <p:clrMapOvr>
-    <a:masterClrMapping/>
-  </p:clrMapOvr>
-</p:sld>
-</file>
-
-<file path=ppt/slides/slide11.xml><?xml version="1.0" encoding="utf-8"?>
-<p:sld xmlns:a="http://schemas.openxmlformats.org/drawingml/2006/main" xmlns:r="http://schemas.openxmlformats.org/officeDocument/2006/relationships" xmlns:p="http://schemas.openxmlformats.org/presentationml/2006/main">
-  <p:cSld>
-    <p:spTree>
-      <p:nvGrpSpPr>
         <p:cNvPr id="1" name="">
           <a:extLst>
             <a:ext uri="{FF2B5EF4-FFF2-40B4-BE49-F238E27FC236}">
@@ -4539,7 +3877,7 @@
 </p:sld>
 </file>
 
-<file path=ppt/slides/slide12.xml><?xml version="1.0" encoding="utf-8"?>
+<file path=ppt/slides/slide11.xml><?xml version="1.0" encoding="utf-8"?>
 <p:sld xmlns:a="http://schemas.openxmlformats.org/drawingml/2006/main" xmlns:r="http://schemas.openxmlformats.org/officeDocument/2006/relationships" xmlns:p="http://schemas.openxmlformats.org/presentationml/2006/main">
   <p:cSld>
     <p:spTree>
@@ -4759,10 +4097,10 @@
           <p:nvPr/>
         </p:nvPicPr>
         <p:blipFill>
-          <a:blip>
+          <a:blip r:embed="rId2">
             <a:extLst>
               <a:ext uri="{96DAC541-7B7A-43D3-8B79-37D633B846F1}">
-                <asvg:svgBlip xmlns:asvg="http://schemas.microsoft.com/office/drawing/2016/SVG/main" r:embed="rId2"/>
+                <asvg:svgBlip xmlns:asvg="http://schemas.microsoft.com/office/drawing/2016/SVG/main" r:embed="rId3"/>
               </a:ext>
             </a:extLst>
           </a:blip>
@@ -4793,7 +4131,7 @@
 </p:sld>
 </file>
 
-<file path=ppt/slides/slide13.xml><?xml version="1.0" encoding="utf-8"?>
+<file path=ppt/slides/slide12.xml><?xml version="1.0" encoding="utf-8"?>
 <p:sld xmlns:a="http://schemas.openxmlformats.org/drawingml/2006/main" xmlns:r="http://schemas.openxmlformats.org/officeDocument/2006/relationships" xmlns:p="http://schemas.openxmlformats.org/presentationml/2006/main">
   <p:cSld>
     <p:spTree>
@@ -4981,10 +4319,10 @@
           <p:nvPr/>
         </p:nvPicPr>
         <p:blipFill>
-          <a:blip>
+          <a:blip r:embed="rId2">
             <a:extLst>
               <a:ext uri="{96DAC541-7B7A-43D3-8B79-37D633B846F1}">
-                <asvg:svgBlip xmlns:asvg="http://schemas.microsoft.com/office/drawing/2016/SVG/main" r:embed="rId2"/>
+                <asvg:svgBlip xmlns:asvg="http://schemas.microsoft.com/office/drawing/2016/SVG/main" r:embed="rId3"/>
               </a:ext>
             </a:extLst>
           </a:blip>
@@ -5015,7 +4353,7 @@
 </p:sld>
 </file>
 
-<file path=ppt/slides/slide14.xml><?xml version="1.0" encoding="utf-8"?>
+<file path=ppt/slides/slide13.xml><?xml version="1.0" encoding="utf-8"?>
 <p:sld xmlns:a="http://schemas.openxmlformats.org/drawingml/2006/main" xmlns:r="http://schemas.openxmlformats.org/officeDocument/2006/relationships" xmlns:p="http://schemas.openxmlformats.org/presentationml/2006/main">
   <p:cSld>
     <p:spTree>
@@ -5621,7 +4959,7 @@
 </p:sld>
 </file>
 
-<file path=ppt/slides/slide15.xml><?xml version="1.0" encoding="utf-8"?>
+<file path=ppt/slides/slide14.xml><?xml version="1.0" encoding="utf-8"?>
 <p:sld xmlns:a="http://schemas.openxmlformats.org/drawingml/2006/main" xmlns:r="http://schemas.openxmlformats.org/officeDocument/2006/relationships" xmlns:p="http://schemas.openxmlformats.org/presentationml/2006/main">
   <p:cSld>
     <p:spTree>
@@ -5907,7 +5245,7 @@
 </p:sld>
 </file>
 
-<file path=ppt/slides/slide16.xml><?xml version="1.0" encoding="utf-8"?>
+<file path=ppt/slides/slide15.xml><?xml version="1.0" encoding="utf-8"?>
 <p:sld xmlns:a="http://schemas.openxmlformats.org/drawingml/2006/main" xmlns:r="http://schemas.openxmlformats.org/officeDocument/2006/relationships" xmlns:p="http://schemas.openxmlformats.org/presentationml/2006/main">
   <p:cSld>
     <p:spTree>
@@ -7441,10 +6779,10 @@
           <p:nvPr/>
         </p:nvPicPr>
         <p:blipFill>
-          <a:blip>
+          <a:blip r:embed="rId3">
             <a:extLst>
               <a:ext uri="{96DAC541-7B7A-43D3-8B79-37D633B846F1}">
-                <asvg:svgBlip xmlns:asvg="http://schemas.microsoft.com/office/drawing/2016/SVG/main" r:embed="rId3"/>
+                <asvg:svgBlip xmlns:asvg="http://schemas.microsoft.com/office/drawing/2016/SVG/main" r:embed="rId4"/>
               </a:ext>
             </a:extLst>
           </a:blip>
@@ -7497,10 +6835,10 @@
             <p:nvPr/>
           </p:nvPicPr>
           <p:blipFill>
-            <a:blip>
+            <a:blip r:embed="rId5">
               <a:extLst>
                 <a:ext uri="{96DAC541-7B7A-43D3-8B79-37D633B846F1}">
-                  <asvg:svgBlip xmlns:asvg="http://schemas.microsoft.com/office/drawing/2016/SVG/main" r:embed="rId4"/>
+                  <asvg:svgBlip xmlns:asvg="http://schemas.microsoft.com/office/drawing/2016/SVG/main" r:embed="rId6"/>
                 </a:ext>
               </a:extLst>
             </a:blip>
@@ -7751,10 +7089,10 @@
             <p:nvPr/>
           </p:nvPicPr>
           <p:blipFill>
-            <a:blip>
+            <a:blip r:embed="rId7">
               <a:extLst>
                 <a:ext uri="{96DAC541-7B7A-43D3-8B79-37D633B846F1}">
-                  <asvg:svgBlip xmlns:asvg="http://schemas.microsoft.com/office/drawing/2016/SVG/main" r:embed="rId5"/>
+                  <asvg:svgBlip xmlns:asvg="http://schemas.microsoft.com/office/drawing/2016/SVG/main" r:embed="rId8"/>
                 </a:ext>
               </a:extLst>
             </a:blip>
@@ -9724,10 +9062,10 @@
       </p:grpSpPr>
       <p:sp>
         <p:nvSpPr>
-          <p:cNvPr id="2" name="Título 1">
+          <p:cNvPr id="6" name="Título 5">
             <a:extLst>
               <a:ext uri="{FF2B5EF4-FFF2-40B4-BE49-F238E27FC236}">
-                <a16:creationId xmlns:a16="http://schemas.microsoft.com/office/drawing/2014/main" id="{64B91400-386A-3B59-D8FD-715054883CDA}"/>
+                <a16:creationId xmlns:a16="http://schemas.microsoft.com/office/drawing/2014/main" id="{CDA9DDB1-CAE4-41A9-9811-45A6B1C2EFB2}"/>
               </a:ext>
             </a:extLst>
           </p:cNvPr>
@@ -9735,7 +9073,7 @@
             <a:spLocks noGrp="1"/>
           </p:cNvSpPr>
           <p:nvPr>
-            <p:ph type="title"/>
+            <p:ph type="ctrTitle"/>
           </p:nvPr>
         </p:nvSpPr>
         <p:spPr/>
@@ -9743,39 +9081,17 @@
           <a:bodyPr/>
           <a:lstStyle/>
           <a:p>
-            <a:endParaRPr lang="pt-BR" dirty="0"/>
-          </a:p>
-        </p:txBody>
-      </p:sp>
-      <p:sp>
-        <p:nvSpPr>
-          <p:cNvPr id="3" name="Espaço Reservado para Conteúdo 2">
-            <a:extLst>
-              <a:ext uri="{FF2B5EF4-FFF2-40B4-BE49-F238E27FC236}">
-                <a16:creationId xmlns:a16="http://schemas.microsoft.com/office/drawing/2014/main" id="{4E51178E-CD76-840C-57E2-7D60F9769EA7}"/>
-              </a:ext>
-            </a:extLst>
-          </p:cNvPr>
-          <p:cNvSpPr>
-            <a:spLocks noGrp="1"/>
-          </p:cNvSpPr>
-          <p:nvPr>
-            <p:ph idx="1"/>
-          </p:nvPr>
-        </p:nvSpPr>
-        <p:spPr/>
-        <p:txBody>
-          <a:bodyPr/>
-          <a:lstStyle/>
-          <a:p>
-            <a:endParaRPr lang="pt-BR"/>
+            <a:r>
+              <a:rPr lang="pt-BR" dirty="0"/>
+              <a:t>Regras do JSX</a:t>
+            </a:r>
           </a:p>
         </p:txBody>
       </p:sp>
     </p:spTree>
     <p:extLst>
       <p:ext uri="{BB962C8B-B14F-4D97-AF65-F5344CB8AC3E}">
-        <p14:creationId xmlns:p14="http://schemas.microsoft.com/office/powerpoint/2010/main" val="1276388577"/>
+        <p14:creationId xmlns:p14="http://schemas.microsoft.com/office/powerpoint/2010/main" val="2968394555"/>
       </p:ext>
     </p:extLst>
   </p:cSld>
@@ -9804,10 +9120,10 @@
       </p:grpSpPr>
       <p:sp>
         <p:nvSpPr>
-          <p:cNvPr id="6" name="Título 5">
+          <p:cNvPr id="2" name="Título 1">
             <a:extLst>
               <a:ext uri="{FF2B5EF4-FFF2-40B4-BE49-F238E27FC236}">
-                <a16:creationId xmlns:a16="http://schemas.microsoft.com/office/drawing/2014/main" id="{CDA9DDB1-CAE4-41A9-9811-45A6B1C2EFB2}"/>
+                <a16:creationId xmlns:a16="http://schemas.microsoft.com/office/drawing/2014/main" id="{99C0A9DB-E10E-793D-F8AE-D7B6FC95187A}"/>
               </a:ext>
             </a:extLst>
           </p:cNvPr>
@@ -9815,7 +9131,7 @@
             <a:spLocks noGrp="1"/>
           </p:cNvSpPr>
           <p:nvPr>
-            <p:ph type="ctrTitle"/>
+            <p:ph type="title"/>
           </p:nvPr>
         </p:nvSpPr>
         <p:spPr/>
@@ -9824,18 +9140,18 @@
           <a:lstStyle/>
           <a:p>
             <a:r>
-              <a:rPr lang="pt-BR" dirty="0"/>
-              <a:t>Regras do JSX</a:t>
+              <a:rPr lang="pt-BR" b="1" dirty="0"/>
+              <a:t>Retornar um único elemento pai</a:t>
             </a:r>
           </a:p>
         </p:txBody>
       </p:sp>
       <p:sp>
         <p:nvSpPr>
-          <p:cNvPr id="7" name="Subtítulo 6">
+          <p:cNvPr id="3" name="Espaço Reservado para Conteúdo 2">
             <a:extLst>
               <a:ext uri="{FF2B5EF4-FFF2-40B4-BE49-F238E27FC236}">
-                <a16:creationId xmlns:a16="http://schemas.microsoft.com/office/drawing/2014/main" id="{CCCC93C8-DEF8-4192-2D6E-26601093807F}"/>
+                <a16:creationId xmlns:a16="http://schemas.microsoft.com/office/drawing/2014/main" id="{EC2D6596-BC6F-2F42-142A-0ABC2E7E634C}"/>
               </a:ext>
             </a:extLst>
           </p:cNvPr>
@@ -9843,22 +9159,188 @@
             <a:spLocks noGrp="1"/>
           </p:cNvSpPr>
           <p:nvPr>
-            <p:ph type="subTitle" idx="1"/>
+            <p:ph idx="1"/>
           </p:nvPr>
         </p:nvSpPr>
-        <p:spPr/>
+        <p:spPr>
+          <a:xfrm>
+            <a:off x="592347" y="1844675"/>
+            <a:ext cx="11007306" cy="665612"/>
+          </a:xfrm>
+        </p:spPr>
         <p:txBody>
           <a:bodyPr/>
           <a:lstStyle/>
           <a:p>
-            <a:endParaRPr lang="pt-BR"/>
+            <a:r>
+              <a:rPr lang="pt-BR" dirty="0"/>
+              <a:t>Todos os elementos devem estar dentro de um elemento principal ou fragmento (&lt;&gt; &lt;/&gt;).</a:t>
+            </a:r>
+          </a:p>
+          <a:p>
+            <a:endParaRPr lang="pt-BR" dirty="0"/>
+          </a:p>
+        </p:txBody>
+      </p:sp>
+      <p:sp>
+        <p:nvSpPr>
+          <p:cNvPr id="5" name="Shape 20">
+            <a:extLst>
+              <a:ext uri="{FF2B5EF4-FFF2-40B4-BE49-F238E27FC236}">
+                <a16:creationId xmlns:a16="http://schemas.microsoft.com/office/drawing/2014/main" id="{DBB5F927-6A29-A95D-B4AD-F2B8BBEB110B}"/>
+              </a:ext>
+            </a:extLst>
+          </p:cNvPr>
+          <p:cNvSpPr/>
+          <p:nvPr/>
+        </p:nvSpPr>
+        <p:spPr>
+          <a:xfrm>
+            <a:off x="2769079" y="2775923"/>
+            <a:ext cx="6653842" cy="2822620"/>
+          </a:xfrm>
+          <a:prstGeom prst="roundRect">
+            <a:avLst>
+              <a:gd name="adj" fmla="val 8081"/>
+            </a:avLst>
+          </a:prstGeom>
+          <a:solidFill>
+            <a:srgbClr val="F2F2F2"/>
+          </a:solidFill>
+          <a:ln/>
+        </p:spPr>
+        <p:txBody>
+          <a:bodyPr/>
+          <a:lstStyle/>
+          <a:p>
+            <a:pPr>
+              <a:lnSpc>
+                <a:spcPct val="150000"/>
+              </a:lnSpc>
+            </a:pPr>
+            <a:r>
+              <a:rPr lang="pt-BR" kern="0" spc="-19" dirty="0" err="1">
+                <a:solidFill>
+                  <a:srgbClr val="D73A49"/>
+                </a:solidFill>
+                <a:latin typeface="Consolas" pitchFamily="34" charset="0"/>
+              </a:rPr>
+              <a:t>return</a:t>
+            </a:r>
+            <a:r>
+              <a:rPr lang="pt-BR" kern="0" spc="-19" dirty="0">
+                <a:solidFill>
+                  <a:srgbClr val="D73A49"/>
+                </a:solidFill>
+                <a:latin typeface="Consolas" pitchFamily="34" charset="0"/>
+              </a:rPr>
+              <a:t> (  </a:t>
+            </a:r>
+          </a:p>
+          <a:p>
+            <a:pPr>
+              <a:lnSpc>
+                <a:spcPct val="150000"/>
+              </a:lnSpc>
+            </a:pPr>
+            <a:r>
+              <a:rPr lang="pt-BR" kern="0" spc="-19" dirty="0">
+                <a:solidFill>
+                  <a:srgbClr val="D73A49"/>
+                </a:solidFill>
+                <a:latin typeface="Consolas" pitchFamily="34" charset="0"/>
+              </a:rPr>
+              <a:t>  &lt;&gt;    </a:t>
+            </a:r>
+          </a:p>
+          <a:p>
+            <a:pPr>
+              <a:lnSpc>
+                <a:spcPct val="150000"/>
+              </a:lnSpc>
+            </a:pPr>
+            <a:r>
+              <a:rPr lang="pt-BR" kern="0" spc="-19" dirty="0">
+                <a:solidFill>
+                  <a:srgbClr val="D73A49"/>
+                </a:solidFill>
+                <a:latin typeface="Consolas" pitchFamily="34" charset="0"/>
+              </a:rPr>
+              <a:t>    &lt;h1&gt;Olá, mundo!&lt;/h1&gt;    </a:t>
+            </a:r>
+          </a:p>
+          <a:p>
+            <a:pPr>
+              <a:lnSpc>
+                <a:spcPct val="150000"/>
+              </a:lnSpc>
+            </a:pPr>
+            <a:r>
+              <a:rPr lang="pt-BR" kern="0" spc="-19" dirty="0">
+                <a:solidFill>
+                  <a:srgbClr val="D73A49"/>
+                </a:solidFill>
+                <a:latin typeface="Consolas" pitchFamily="34" charset="0"/>
+              </a:rPr>
+              <a:t>    &lt;p&gt;Bem-vindo ao </a:t>
+            </a:r>
+            <a:r>
+              <a:rPr lang="pt-BR" kern="0" spc="-19" dirty="0" err="1">
+                <a:solidFill>
+                  <a:srgbClr val="D73A49"/>
+                </a:solidFill>
+                <a:latin typeface="Consolas" pitchFamily="34" charset="0"/>
+              </a:rPr>
+              <a:t>React</a:t>
+            </a:r>
+            <a:r>
+              <a:rPr lang="pt-BR" kern="0" spc="-19" dirty="0">
+                <a:solidFill>
+                  <a:srgbClr val="D73A49"/>
+                </a:solidFill>
+                <a:latin typeface="Consolas" pitchFamily="34" charset="0"/>
+              </a:rPr>
+              <a:t>.&lt;/p&gt;  </a:t>
+            </a:r>
+          </a:p>
+          <a:p>
+            <a:pPr>
+              <a:lnSpc>
+                <a:spcPct val="150000"/>
+              </a:lnSpc>
+            </a:pPr>
+            <a:r>
+              <a:rPr lang="pt-BR" kern="0" spc="-19" dirty="0">
+                <a:solidFill>
+                  <a:srgbClr val="D73A49"/>
+                </a:solidFill>
+                <a:latin typeface="Consolas" pitchFamily="34" charset="0"/>
+              </a:rPr>
+              <a:t>  &lt;/&gt;</a:t>
+            </a:r>
+          </a:p>
+          <a:p>
+            <a:pPr>
+              <a:lnSpc>
+                <a:spcPct val="150000"/>
+              </a:lnSpc>
+            </a:pPr>
+            <a:r>
+              <a:rPr lang="pt-BR" kern="0" spc="-19" dirty="0">
+                <a:solidFill>
+                  <a:srgbClr val="D73A49"/>
+                </a:solidFill>
+                <a:latin typeface="Consolas" pitchFamily="34" charset="0"/>
+              </a:rPr>
+              <a:t>);</a:t>
+            </a:r>
           </a:p>
         </p:txBody>
       </p:sp>
     </p:spTree>
     <p:extLst>
       <p:ext uri="{BB962C8B-B14F-4D97-AF65-F5344CB8AC3E}">
-        <p14:creationId xmlns:p14="http://schemas.microsoft.com/office/powerpoint/2010/main" val="2968394555"/>
+        <p14:creationId xmlns:p14="http://schemas.microsoft.com/office/powerpoint/2010/main" val="864882273"/>
       </p:ext>
     </p:extLst>
   </p:cSld>
@@ -9890,7 +9372,7 @@
           <p:cNvPr id="2" name="Título 1">
             <a:extLst>
               <a:ext uri="{FF2B5EF4-FFF2-40B4-BE49-F238E27FC236}">
-                <a16:creationId xmlns:a16="http://schemas.microsoft.com/office/drawing/2014/main" id="{99C0A9DB-E10E-793D-F8AE-D7B6FC95187A}"/>
+                <a16:creationId xmlns:a16="http://schemas.microsoft.com/office/drawing/2014/main" id="{FB438DB6-24A7-2EE8-2F09-818FEA0B13E5}"/>
               </a:ext>
             </a:extLst>
           </p:cNvPr>
@@ -9907,8 +9389,16 @@
           <a:lstStyle/>
           <a:p>
             <a:r>
-              <a:rPr lang="pt-BR" b="1" dirty="0"/>
-              <a:t>Retornar um único elemento pai</a:t>
+              <a:rPr lang="pt-BR" dirty="0"/>
+              <a:t>Regra: Utilizar uma única </a:t>
+            </a:r>
+            <a:r>
+              <a:rPr lang="pt-BR" dirty="0" err="1"/>
+              <a:t>tag</a:t>
+            </a:r>
+            <a:r>
+              <a:rPr lang="pt-BR" dirty="0"/>
+              <a:t> pai</a:t>
             </a:r>
           </a:p>
         </p:txBody>
@@ -9918,7 +9408,7 @@
           <p:cNvPr id="3" name="Espaço Reservado para Conteúdo 2">
             <a:extLst>
               <a:ext uri="{FF2B5EF4-FFF2-40B4-BE49-F238E27FC236}">
-                <a16:creationId xmlns:a16="http://schemas.microsoft.com/office/drawing/2014/main" id="{EC2D6596-BC6F-2F42-142A-0ABC2E7E634C}"/>
+                <a16:creationId xmlns:a16="http://schemas.microsoft.com/office/drawing/2014/main" id="{4CE731E1-BF12-8612-DF4A-E948BE49BAE0}"/>
               </a:ext>
             </a:extLst>
           </p:cNvPr>
@@ -9932,7 +9422,7 @@
         <p:spPr>
           <a:xfrm>
             <a:off x="592347" y="1844675"/>
-            <a:ext cx="11007306" cy="665612"/>
+            <a:ext cx="11007306" cy="722399"/>
           </a:xfrm>
         </p:spPr>
         <p:txBody>
@@ -9941,173 +9431,576 @@
           <a:p>
             <a:r>
               <a:rPr lang="pt-BR" dirty="0"/>
-              <a:t>Todos os elementos devem estar dentro de um elemento principal ou fragmento (&lt;&gt; &lt;/&gt;).</a:t>
-            </a:r>
-          </a:p>
-          <a:p>
-            <a:endParaRPr lang="pt-BR" dirty="0"/>
+              <a:t>No JSX, todos os elementos retornados por um componente devem estar dentro de um único elemento pai.</a:t>
+            </a:r>
+          </a:p>
+        </p:txBody>
+      </p:sp>
+      <p:grpSp>
+        <p:nvGrpSpPr>
+          <p:cNvPr id="13" name="Agrupar 12">
+            <a:extLst>
+              <a:ext uri="{FF2B5EF4-FFF2-40B4-BE49-F238E27FC236}">
+                <a16:creationId xmlns:a16="http://schemas.microsoft.com/office/drawing/2014/main" id="{C0AF780F-F8AB-7BFA-ED23-6114DA50AEC8}"/>
+              </a:ext>
+            </a:extLst>
+          </p:cNvPr>
+          <p:cNvGrpSpPr/>
+          <p:nvPr/>
+        </p:nvGrpSpPr>
+        <p:grpSpPr>
+          <a:xfrm>
+            <a:off x="744152" y="3217654"/>
+            <a:ext cx="4710023" cy="3168140"/>
+            <a:chOff x="744152" y="3217654"/>
+            <a:chExt cx="4710023" cy="3168140"/>
+          </a:xfrm>
+        </p:grpSpPr>
+        <p:sp>
+          <p:nvSpPr>
+            <p:cNvPr id="7" name="Shape 20">
+              <a:extLst>
+                <a:ext uri="{FF2B5EF4-FFF2-40B4-BE49-F238E27FC236}">
+                  <a16:creationId xmlns:a16="http://schemas.microsoft.com/office/drawing/2014/main" id="{6700C51B-411A-ED88-F128-08B49EA6AE41}"/>
+                </a:ext>
+              </a:extLst>
+            </p:cNvPr>
+            <p:cNvSpPr/>
+            <p:nvPr/>
+          </p:nvSpPr>
+          <p:spPr>
+            <a:xfrm>
+              <a:off x="744152" y="3217654"/>
+              <a:ext cx="4710023" cy="3168140"/>
+            </a:xfrm>
+            <a:prstGeom prst="roundRect">
+              <a:avLst>
+                <a:gd name="adj" fmla="val 8081"/>
+              </a:avLst>
+            </a:prstGeom>
+            <a:solidFill>
+              <a:srgbClr val="F2F2F2"/>
+            </a:solidFill>
+            <a:ln/>
+          </p:spPr>
+          <p:txBody>
+            <a:bodyPr/>
+            <a:lstStyle/>
+            <a:p>
+              <a:pPr>
+                <a:lnSpc>
+                  <a:spcPct val="150000"/>
+                </a:lnSpc>
+              </a:pPr>
+              <a:endParaRPr lang="pt-BR" kern="0" spc="-19" dirty="0">
+                <a:solidFill>
+                  <a:srgbClr val="D73A49"/>
+                </a:solidFill>
+                <a:latin typeface="Consolas" pitchFamily="34" charset="0"/>
+              </a:endParaRPr>
+            </a:p>
+          </p:txBody>
+        </p:sp>
+        <p:sp>
+          <p:nvSpPr>
+            <p:cNvPr id="8" name="CaixaDeTexto 7">
+              <a:extLst>
+                <a:ext uri="{FF2B5EF4-FFF2-40B4-BE49-F238E27FC236}">
+                  <a16:creationId xmlns:a16="http://schemas.microsoft.com/office/drawing/2014/main" id="{F5C5ADDE-0311-7903-7B55-714BAFDF1140}"/>
+                </a:ext>
+              </a:extLst>
+            </p:cNvPr>
+            <p:cNvSpPr txBox="1"/>
+            <p:nvPr/>
+          </p:nvSpPr>
+          <p:spPr>
+            <a:xfrm>
+              <a:off x="935993" y="3837148"/>
+              <a:ext cx="4326340" cy="2125325"/>
+            </a:xfrm>
+            <a:prstGeom prst="rect">
+              <a:avLst/>
+            </a:prstGeom>
+            <a:noFill/>
+          </p:spPr>
+          <p:txBody>
+            <a:bodyPr wrap="square">
+              <a:spAutoFit/>
+            </a:bodyPr>
+            <a:lstStyle/>
+            <a:p>
+              <a:pPr>
+                <a:lnSpc>
+                  <a:spcPct val="150000"/>
+                </a:lnSpc>
+              </a:pPr>
+              <a:r>
+                <a:rPr lang="pt-BR" sz="1800" kern="0" spc="-19" dirty="0" err="1">
+                  <a:solidFill>
+                    <a:srgbClr val="D73A49"/>
+                  </a:solidFill>
+                  <a:latin typeface="Consolas" pitchFamily="34" charset="0"/>
+                </a:rPr>
+                <a:t>return</a:t>
+              </a:r>
+              <a:r>
+                <a:rPr lang="pt-BR" sz="1800" kern="0" spc="-19" dirty="0">
+                  <a:solidFill>
+                    <a:srgbClr val="D73A49"/>
+                  </a:solidFill>
+                  <a:latin typeface="Consolas" pitchFamily="34" charset="0"/>
+                </a:rPr>
+                <a:t> (  </a:t>
+              </a:r>
+            </a:p>
+            <a:p>
+              <a:pPr>
+                <a:lnSpc>
+                  <a:spcPct val="150000"/>
+                </a:lnSpc>
+              </a:pPr>
+              <a:r>
+                <a:rPr lang="pt-BR" sz="1800" kern="0" spc="-19" dirty="0">
+                  <a:solidFill>
+                    <a:srgbClr val="D73A49"/>
+                  </a:solidFill>
+                  <a:latin typeface="Consolas" pitchFamily="34" charset="0"/>
+                </a:rPr>
+                <a:t>  &lt;h1&gt;Olá, mundo!&lt;/h1&gt;  </a:t>
+              </a:r>
+            </a:p>
+            <a:p>
+              <a:pPr>
+                <a:lnSpc>
+                  <a:spcPct val="150000"/>
+                </a:lnSpc>
+              </a:pPr>
+              <a:r>
+                <a:rPr lang="pt-BR" sz="1800" kern="0" spc="-19" dirty="0">
+                  <a:solidFill>
+                    <a:srgbClr val="D73A49"/>
+                  </a:solidFill>
+                  <a:latin typeface="Consolas" pitchFamily="34" charset="0"/>
+                </a:rPr>
+                <a:t>  &lt;p&gt;Bem-vindo ao </a:t>
+              </a:r>
+              <a:r>
+                <a:rPr lang="pt-BR" sz="1800" kern="0" spc="-19" dirty="0" err="1">
+                  <a:solidFill>
+                    <a:srgbClr val="D73A49"/>
+                  </a:solidFill>
+                  <a:latin typeface="Consolas" pitchFamily="34" charset="0"/>
+                </a:rPr>
+                <a:t>React</a:t>
+              </a:r>
+              <a:r>
+                <a:rPr lang="pt-BR" sz="1800" kern="0" spc="-19" dirty="0">
+                  <a:solidFill>
+                    <a:srgbClr val="D73A49"/>
+                  </a:solidFill>
+                  <a:latin typeface="Consolas" pitchFamily="34" charset="0"/>
+                </a:rPr>
+                <a:t>!&lt;/p&gt;</a:t>
+              </a:r>
+            </a:p>
+            <a:p>
+              <a:pPr>
+                <a:lnSpc>
+                  <a:spcPct val="150000"/>
+                </a:lnSpc>
+              </a:pPr>
+              <a:r>
+                <a:rPr lang="pt-BR" sz="1800" kern="0" spc="-19" dirty="0">
+                  <a:solidFill>
+                    <a:srgbClr val="D73A49"/>
+                  </a:solidFill>
+                  <a:latin typeface="Consolas" pitchFamily="34" charset="0"/>
+                </a:rPr>
+                <a:t>);</a:t>
+              </a:r>
+            </a:p>
+            <a:p>
+              <a:pPr>
+                <a:lnSpc>
+                  <a:spcPct val="150000"/>
+                </a:lnSpc>
+              </a:pPr>
+              <a:endParaRPr lang="pt-BR" sz="1800" kern="0" spc="-19" dirty="0">
+                <a:solidFill>
+                  <a:srgbClr val="D73A49"/>
+                </a:solidFill>
+                <a:latin typeface="Consolas" pitchFamily="34" charset="0"/>
+              </a:endParaRPr>
+            </a:p>
+          </p:txBody>
+        </p:sp>
+      </p:grpSp>
+      <p:grpSp>
+        <p:nvGrpSpPr>
+          <p:cNvPr id="12" name="Agrupar 11">
+            <a:extLst>
+              <a:ext uri="{FF2B5EF4-FFF2-40B4-BE49-F238E27FC236}">
+                <a16:creationId xmlns:a16="http://schemas.microsoft.com/office/drawing/2014/main" id="{867A3347-55AE-0C96-0399-43E86CCC6C53}"/>
+              </a:ext>
+            </a:extLst>
+          </p:cNvPr>
+          <p:cNvGrpSpPr/>
+          <p:nvPr/>
+        </p:nvGrpSpPr>
+        <p:grpSpPr>
+          <a:xfrm>
+            <a:off x="6737825" y="3217654"/>
+            <a:ext cx="4710023" cy="3168141"/>
+            <a:chOff x="6174419" y="3333708"/>
+            <a:chExt cx="4710023" cy="3168141"/>
+          </a:xfrm>
+        </p:grpSpPr>
+        <p:sp>
+          <p:nvSpPr>
+            <p:cNvPr id="10" name="Shape 20">
+              <a:extLst>
+                <a:ext uri="{FF2B5EF4-FFF2-40B4-BE49-F238E27FC236}">
+                  <a16:creationId xmlns:a16="http://schemas.microsoft.com/office/drawing/2014/main" id="{55E654D0-04B0-CF34-5BED-4B0178C6C1DB}"/>
+                </a:ext>
+              </a:extLst>
+            </p:cNvPr>
+            <p:cNvSpPr/>
+            <p:nvPr/>
+          </p:nvSpPr>
+          <p:spPr>
+            <a:xfrm>
+              <a:off x="6174419" y="3333708"/>
+              <a:ext cx="4710023" cy="3168141"/>
+            </a:xfrm>
+            <a:prstGeom prst="roundRect">
+              <a:avLst>
+                <a:gd name="adj" fmla="val 8081"/>
+              </a:avLst>
+            </a:prstGeom>
+            <a:solidFill>
+              <a:srgbClr val="F2F2F2"/>
+            </a:solidFill>
+            <a:ln/>
+          </p:spPr>
+          <p:txBody>
+            <a:bodyPr/>
+            <a:lstStyle/>
+            <a:p>
+              <a:pPr>
+                <a:lnSpc>
+                  <a:spcPct val="150000"/>
+                </a:lnSpc>
+              </a:pPr>
+              <a:endParaRPr lang="pt-BR" kern="0" spc="-19" dirty="0">
+                <a:solidFill>
+                  <a:srgbClr val="D73A49"/>
+                </a:solidFill>
+                <a:latin typeface="Consolas" pitchFamily="34" charset="0"/>
+              </a:endParaRPr>
+            </a:p>
+          </p:txBody>
+        </p:sp>
+        <p:sp>
+          <p:nvSpPr>
+            <p:cNvPr id="11" name="CaixaDeTexto 10">
+              <a:extLst>
+                <a:ext uri="{FF2B5EF4-FFF2-40B4-BE49-F238E27FC236}">
+                  <a16:creationId xmlns:a16="http://schemas.microsoft.com/office/drawing/2014/main" id="{5841F903-E94D-50FC-7CF1-62F588400304}"/>
+                </a:ext>
+              </a:extLst>
+            </p:cNvPr>
+            <p:cNvSpPr txBox="1"/>
+            <p:nvPr/>
+          </p:nvSpPr>
+          <p:spPr>
+            <a:xfrm>
+              <a:off x="6366260" y="3647367"/>
+              <a:ext cx="4326340" cy="2540822"/>
+            </a:xfrm>
+            <a:prstGeom prst="rect">
+              <a:avLst/>
+            </a:prstGeom>
+            <a:noFill/>
+          </p:spPr>
+          <p:txBody>
+            <a:bodyPr wrap="square">
+              <a:spAutoFit/>
+            </a:bodyPr>
+            <a:lstStyle/>
+            <a:p>
+              <a:pPr>
+                <a:lnSpc>
+                  <a:spcPct val="150000"/>
+                </a:lnSpc>
+              </a:pPr>
+              <a:r>
+                <a:rPr lang="pt-BR" sz="1800" kern="0" spc="-19" dirty="0" err="1">
+                  <a:solidFill>
+                    <a:srgbClr val="D73A49"/>
+                  </a:solidFill>
+                  <a:latin typeface="Consolas" pitchFamily="34" charset="0"/>
+                </a:rPr>
+                <a:t>return</a:t>
+              </a:r>
+              <a:r>
+                <a:rPr lang="pt-BR" sz="1800" kern="0" spc="-19" dirty="0">
+                  <a:solidFill>
+                    <a:srgbClr val="D73A49"/>
+                  </a:solidFill>
+                  <a:latin typeface="Consolas" pitchFamily="34" charset="0"/>
+                </a:rPr>
+                <a:t> (  </a:t>
+              </a:r>
+            </a:p>
+            <a:p>
+              <a:pPr>
+                <a:lnSpc>
+                  <a:spcPct val="150000"/>
+                </a:lnSpc>
+              </a:pPr>
+              <a:r>
+                <a:rPr lang="pt-BR" sz="1800" kern="0" spc="-19" dirty="0">
+                  <a:solidFill>
+                    <a:srgbClr val="D73A49"/>
+                  </a:solidFill>
+                  <a:latin typeface="Consolas" pitchFamily="34" charset="0"/>
+                </a:rPr>
+                <a:t>  &lt;</a:t>
+              </a:r>
+              <a:r>
+                <a:rPr lang="pt-BR" sz="1800" kern="0" spc="-19" dirty="0" err="1">
+                  <a:solidFill>
+                    <a:srgbClr val="D73A49"/>
+                  </a:solidFill>
+                  <a:latin typeface="Consolas" pitchFamily="34" charset="0"/>
+                </a:rPr>
+                <a:t>div</a:t>
+              </a:r>
+              <a:r>
+                <a:rPr lang="pt-BR" sz="1800" kern="0" spc="-19" dirty="0">
+                  <a:solidFill>
+                    <a:srgbClr val="D73A49"/>
+                  </a:solidFill>
+                  <a:latin typeface="Consolas" pitchFamily="34" charset="0"/>
+                </a:rPr>
+                <a:t>&gt;    </a:t>
+              </a:r>
+            </a:p>
+            <a:p>
+              <a:pPr>
+                <a:lnSpc>
+                  <a:spcPct val="150000"/>
+                </a:lnSpc>
+              </a:pPr>
+              <a:r>
+                <a:rPr lang="pt-BR" sz="1800" kern="0" spc="-19" dirty="0">
+                  <a:solidFill>
+                    <a:srgbClr val="D73A49"/>
+                  </a:solidFill>
+                  <a:latin typeface="Consolas" pitchFamily="34" charset="0"/>
+                </a:rPr>
+                <a:t>    &lt;h1&gt;Olá, mundo!&lt;/h1&gt;    </a:t>
+              </a:r>
+            </a:p>
+            <a:p>
+              <a:pPr>
+                <a:lnSpc>
+                  <a:spcPct val="150000"/>
+                </a:lnSpc>
+              </a:pPr>
+              <a:r>
+                <a:rPr lang="pt-BR" sz="1800" kern="0" spc="-19" dirty="0">
+                  <a:solidFill>
+                    <a:srgbClr val="D73A49"/>
+                  </a:solidFill>
+                  <a:latin typeface="Consolas" pitchFamily="34" charset="0"/>
+                </a:rPr>
+                <a:t>    &lt;p&gt;Bem-vindo ao </a:t>
+              </a:r>
+              <a:r>
+                <a:rPr lang="pt-BR" sz="1800" kern="0" spc="-19" dirty="0" err="1">
+                  <a:solidFill>
+                    <a:srgbClr val="D73A49"/>
+                  </a:solidFill>
+                  <a:latin typeface="Consolas" pitchFamily="34" charset="0"/>
+                </a:rPr>
+                <a:t>React</a:t>
+              </a:r>
+              <a:r>
+                <a:rPr lang="pt-BR" sz="1800" kern="0" spc="-19" dirty="0">
+                  <a:solidFill>
+                    <a:srgbClr val="D73A49"/>
+                  </a:solidFill>
+                  <a:latin typeface="Consolas" pitchFamily="34" charset="0"/>
+                </a:rPr>
+                <a:t>!&lt;/p&gt;</a:t>
+              </a:r>
+            </a:p>
+            <a:p>
+              <a:pPr>
+                <a:lnSpc>
+                  <a:spcPct val="150000"/>
+                </a:lnSpc>
+              </a:pPr>
+              <a:r>
+                <a:rPr lang="pt-BR" kern="0" spc="-19" dirty="0">
+                  <a:solidFill>
+                    <a:srgbClr val="D73A49"/>
+                  </a:solidFill>
+                  <a:latin typeface="Consolas" pitchFamily="34" charset="0"/>
+                </a:rPr>
+                <a:t>  </a:t>
+              </a:r>
+              <a:r>
+                <a:rPr lang="pt-BR" sz="1800" kern="0" spc="-19" dirty="0">
+                  <a:solidFill>
+                    <a:srgbClr val="D73A49"/>
+                  </a:solidFill>
+                  <a:latin typeface="Consolas" pitchFamily="34" charset="0"/>
+                </a:rPr>
+                <a:t>&lt;/</a:t>
+              </a:r>
+              <a:r>
+                <a:rPr lang="pt-BR" sz="1800" kern="0" spc="-19" dirty="0" err="1">
+                  <a:solidFill>
+                    <a:srgbClr val="D73A49"/>
+                  </a:solidFill>
+                  <a:latin typeface="Consolas" pitchFamily="34" charset="0"/>
+                </a:rPr>
+                <a:t>div</a:t>
+              </a:r>
+              <a:r>
+                <a:rPr lang="pt-BR" sz="1800" kern="0" spc="-19" dirty="0">
+                  <a:solidFill>
+                    <a:srgbClr val="D73A49"/>
+                  </a:solidFill>
+                  <a:latin typeface="Consolas" pitchFamily="34" charset="0"/>
+                </a:rPr>
+                <a:t>&gt;</a:t>
+              </a:r>
+            </a:p>
+            <a:p>
+              <a:pPr>
+                <a:lnSpc>
+                  <a:spcPct val="150000"/>
+                </a:lnSpc>
+              </a:pPr>
+              <a:r>
+                <a:rPr lang="pt-BR" sz="1800" kern="0" spc="-19" dirty="0">
+                  <a:solidFill>
+                    <a:srgbClr val="D73A49"/>
+                  </a:solidFill>
+                  <a:latin typeface="Consolas" pitchFamily="34" charset="0"/>
+                </a:rPr>
+                <a:t>);  </a:t>
+              </a:r>
+            </a:p>
+          </p:txBody>
+        </p:sp>
+      </p:grpSp>
+      <p:sp>
+        <p:nvSpPr>
+          <p:cNvPr id="15" name="CaixaDeTexto 14">
+            <a:extLst>
+              <a:ext uri="{FF2B5EF4-FFF2-40B4-BE49-F238E27FC236}">
+                <a16:creationId xmlns:a16="http://schemas.microsoft.com/office/drawing/2014/main" id="{224E89D1-DD63-C095-2DA2-4B55F7CBBC99}"/>
+              </a:ext>
+            </a:extLst>
+          </p:cNvPr>
+          <p:cNvSpPr txBox="1"/>
+          <p:nvPr/>
+        </p:nvSpPr>
+        <p:spPr>
+          <a:xfrm>
+            <a:off x="744152" y="2609667"/>
+            <a:ext cx="1485343" cy="369332"/>
+          </a:xfrm>
+          <a:prstGeom prst="rect">
+            <a:avLst/>
+          </a:prstGeom>
+          <a:noFill/>
+        </p:spPr>
+        <p:txBody>
+          <a:bodyPr wrap="none" rtlCol="0">
+            <a:spAutoFit/>
+          </a:bodyPr>
+          <a:lstStyle/>
+          <a:p>
+            <a:r>
+              <a:rPr lang="pt-BR" b="1" dirty="0">
+                <a:solidFill>
+                  <a:srgbClr val="FF0000"/>
+                </a:solidFill>
+                <a:latin typeface="Times New Roman" panose="02020603050405020304" pitchFamily="18" charset="0"/>
+                <a:cs typeface="Times New Roman" panose="02020603050405020304" pitchFamily="18" charset="0"/>
+              </a:rPr>
+              <a:t>❌ Incorreto</a:t>
+            </a:r>
           </a:p>
         </p:txBody>
       </p:sp>
       <p:sp>
         <p:nvSpPr>
-          <p:cNvPr id="5" name="Shape 20">
+          <p:cNvPr id="17" name="CaixaDeTexto 16">
             <a:extLst>
               <a:ext uri="{FF2B5EF4-FFF2-40B4-BE49-F238E27FC236}">
-                <a16:creationId xmlns:a16="http://schemas.microsoft.com/office/drawing/2014/main" id="{DBB5F927-6A29-A95D-B4AD-F2B8BBEB110B}"/>
+                <a16:creationId xmlns:a16="http://schemas.microsoft.com/office/drawing/2014/main" id="{ED3C0AC0-0D08-6CDF-C19D-095023B1AB30}"/>
               </a:ext>
             </a:extLst>
           </p:cNvPr>
-          <p:cNvSpPr/>
+          <p:cNvSpPr txBox="1"/>
           <p:nvPr/>
         </p:nvSpPr>
         <p:spPr>
           <a:xfrm>
-            <a:off x="2769079" y="2775923"/>
-            <a:ext cx="6653842" cy="2822620"/>
+            <a:off x="6737825" y="2609667"/>
+            <a:ext cx="3069110" cy="369332"/>
           </a:xfrm>
-          <a:prstGeom prst="roundRect">
-            <a:avLst>
-              <a:gd name="adj" fmla="val 8081"/>
-            </a:avLst>
+          <a:prstGeom prst="rect">
+            <a:avLst/>
           </a:prstGeom>
-          <a:solidFill>
-            <a:srgbClr val="F2F2F2"/>
-          </a:solidFill>
-          <a:ln/>
+          <a:noFill/>
         </p:spPr>
         <p:txBody>
-          <a:bodyPr/>
+          <a:bodyPr wrap="none" rtlCol="0">
+            <a:spAutoFit/>
+          </a:bodyPr>
           <a:lstStyle/>
           <a:p>
-            <a:pPr>
-              <a:lnSpc>
-                <a:spcPct val="150000"/>
-              </a:lnSpc>
-            </a:pPr>
-            <a:r>
-              <a:rPr lang="pt-BR" kern="0" spc="-19" dirty="0" err="1">
+            <a:r>
+              <a:rPr lang="pt-BR" b="1" dirty="0">
                 <a:solidFill>
-                  <a:srgbClr val="D73A49"/>
+                  <a:srgbClr val="66A480"/>
                 </a:solidFill>
-                <a:latin typeface="Consolas" pitchFamily="34" charset="0"/>
+                <a:latin typeface="Times New Roman" panose="02020603050405020304" pitchFamily="18" charset="0"/>
+                <a:cs typeface="Times New Roman" panose="02020603050405020304" pitchFamily="18" charset="0"/>
               </a:rPr>
-              <a:t>return</a:t>
-            </a:r>
-            <a:r>
-              <a:rPr lang="pt-BR" kern="0" spc="-19" dirty="0">
+              <a:t>✅ Correto — Utilizando </a:t>
+            </a:r>
+            <a:r>
+              <a:rPr lang="pt-BR" b="1" dirty="0" err="1">
                 <a:solidFill>
-                  <a:srgbClr val="D73A49"/>
+                  <a:srgbClr val="66A480"/>
                 </a:solidFill>
-                <a:latin typeface="Consolas" pitchFamily="34" charset="0"/>
+                <a:latin typeface="Times New Roman" panose="02020603050405020304" pitchFamily="18" charset="0"/>
+                <a:cs typeface="Times New Roman" panose="02020603050405020304" pitchFamily="18" charset="0"/>
               </a:rPr>
-              <a:t> (  </a:t>
-            </a:r>
-          </a:p>
-          <a:p>
-            <a:pPr>
-              <a:lnSpc>
-                <a:spcPct val="150000"/>
-              </a:lnSpc>
-            </a:pPr>
-            <a:r>
-              <a:rPr lang="pt-BR" kern="0" spc="-19" dirty="0">
-                <a:solidFill>
-                  <a:srgbClr val="D73A49"/>
-                </a:solidFill>
-                <a:latin typeface="Consolas" pitchFamily="34" charset="0"/>
-              </a:rPr>
-              <a:t>  &lt;&gt;    </a:t>
-            </a:r>
-          </a:p>
-          <a:p>
-            <a:pPr>
-              <a:lnSpc>
-                <a:spcPct val="150000"/>
-              </a:lnSpc>
-            </a:pPr>
-            <a:r>
-              <a:rPr lang="pt-BR" kern="0" spc="-19" dirty="0">
-                <a:solidFill>
-                  <a:srgbClr val="D73A49"/>
-                </a:solidFill>
-                <a:latin typeface="Consolas" pitchFamily="34" charset="0"/>
-              </a:rPr>
-              <a:t>    &lt;h1&gt;Olá, mundo!&lt;/h1&gt;    </a:t>
-            </a:r>
-          </a:p>
-          <a:p>
-            <a:pPr>
-              <a:lnSpc>
-                <a:spcPct val="150000"/>
-              </a:lnSpc>
-            </a:pPr>
-            <a:r>
-              <a:rPr lang="pt-BR" kern="0" spc="-19" dirty="0">
-                <a:solidFill>
-                  <a:srgbClr val="D73A49"/>
-                </a:solidFill>
-                <a:latin typeface="Consolas" pitchFamily="34" charset="0"/>
-              </a:rPr>
-              <a:t>    &lt;p&gt;Bem-vindo ao </a:t>
-            </a:r>
-            <a:r>
-              <a:rPr lang="pt-BR" kern="0" spc="-19" dirty="0" err="1">
-                <a:solidFill>
-                  <a:srgbClr val="D73A49"/>
-                </a:solidFill>
-                <a:latin typeface="Consolas" pitchFamily="34" charset="0"/>
-              </a:rPr>
-              <a:t>React</a:t>
-            </a:r>
-            <a:r>
-              <a:rPr lang="pt-BR" kern="0" spc="-19" dirty="0">
-                <a:solidFill>
-                  <a:srgbClr val="D73A49"/>
-                </a:solidFill>
-                <a:latin typeface="Consolas" pitchFamily="34" charset="0"/>
-              </a:rPr>
-              <a:t>.&lt;/p&gt;  </a:t>
-            </a:r>
-          </a:p>
-          <a:p>
-            <a:pPr>
-              <a:lnSpc>
-                <a:spcPct val="150000"/>
-              </a:lnSpc>
-            </a:pPr>
-            <a:r>
-              <a:rPr lang="pt-BR" kern="0" spc="-19" dirty="0">
-                <a:solidFill>
-                  <a:srgbClr val="D73A49"/>
-                </a:solidFill>
-                <a:latin typeface="Consolas" pitchFamily="34" charset="0"/>
-              </a:rPr>
-              <a:t>  &lt;/&gt;</a:t>
-            </a:r>
-          </a:p>
-          <a:p>
-            <a:pPr>
-              <a:lnSpc>
-                <a:spcPct val="150000"/>
-              </a:lnSpc>
-            </a:pPr>
-            <a:r>
-              <a:rPr lang="pt-BR" kern="0" spc="-19" dirty="0">
-                <a:solidFill>
-                  <a:srgbClr val="D73A49"/>
-                </a:solidFill>
-                <a:latin typeface="Consolas" pitchFamily="34" charset="0"/>
-              </a:rPr>
-              <a:t>);</a:t>
-            </a:r>
+              <a:t>div</a:t>
+            </a:r>
+            <a:endParaRPr lang="pt-BR" b="1" dirty="0">
+              <a:solidFill>
+                <a:srgbClr val="66A480"/>
+              </a:solidFill>
+              <a:latin typeface="Times New Roman" panose="02020603050405020304" pitchFamily="18" charset="0"/>
+              <a:cs typeface="Times New Roman" panose="02020603050405020304" pitchFamily="18" charset="0"/>
+            </a:endParaRPr>
           </a:p>
         </p:txBody>
       </p:sp>
     </p:spTree>
     <p:extLst>
       <p:ext uri="{BB962C8B-B14F-4D97-AF65-F5344CB8AC3E}">
-        <p14:creationId xmlns:p14="http://schemas.microsoft.com/office/powerpoint/2010/main" val="864882273"/>
+        <p14:creationId xmlns:p14="http://schemas.microsoft.com/office/powerpoint/2010/main" val="3889538878"/>
       </p:ext>
     </p:extLst>
   </p:cSld>
